--- a/make_presentation/templates/templates/creative/_5.pptx
+++ b/make_presentation/templates/templates/creative/_5.pptx
@@ -71,13 +71,7 @@
               <a:rPr b="0" lang="en-US" sz="4400" spc="-1" strike="noStrike">
                 <a:latin typeface="Arial"/>
               </a:rPr>
-              <a:t>Click to move </a:t>
-            </a:r>
-            <a:r>
-              <a:rPr b="0" lang="en-US" sz="4400" spc="-1" strike="noStrike">
-                <a:latin typeface="Arial"/>
-              </a:rPr>
-              <a:t>the slide</a:t>
+              <a:t>Click to move the slide</a:t>
             </a:r>
             <a:endParaRPr b="0" lang="en-US" sz="4400" spc="-1" strike="noStrike">
               <a:latin typeface="Arial"/>
@@ -302,7 +296,7 @@
             <a:pPr algn="r">
               <a:buNone/>
             </a:pPr>
-            <a:fld id="{5BCF2C81-7038-481C-8936-765721627B01}" type="slidenum">
+            <a:fld id="{5EFB18E3-FBFF-44F6-A28C-BC3E0ACB7526}" type="slidenum">
               <a:rPr b="0" lang="en-US" sz="1400" spc="-1" strike="noStrike">
                 <a:latin typeface="Times New Roman"/>
               </a:rPr>
@@ -350,7 +344,7 @@
         <p:spPr>
           <a:xfrm>
             <a:off x="685800" y="1143000"/>
-            <a:ext cx="5485680" cy="3085560"/>
+            <a:ext cx="5485320" cy="3085200"/>
           </a:xfrm>
           <a:prstGeom prst="rect">
             <a:avLst/>
@@ -373,7 +367,7 @@
         <p:spPr>
           <a:xfrm>
             <a:off x="685800" y="4400640"/>
-            <a:ext cx="5485680" cy="3599640"/>
+            <a:ext cx="5485320" cy="3599280"/>
           </a:xfrm>
           <a:prstGeom prst="rect">
             <a:avLst/>
@@ -407,7 +401,7 @@
         <p:spPr>
           <a:xfrm>
             <a:off x="3884760" y="8685360"/>
-            <a:ext cx="2971080" cy="457920"/>
+            <a:ext cx="2970720" cy="457560"/>
           </a:xfrm>
           <a:prstGeom prst="rect">
             <a:avLst/>
@@ -439,7 +433,7 @@
               </a:lnSpc>
               <a:buNone/>
             </a:pPr>
-            <a:fld id="{DB606388-8C10-4FB5-BBF8-C1960694CB4F}" type="slidenum">
+            <a:fld id="{E40F5E46-570A-4A76-B5C3-26C5EB1EB731}" type="slidenum">
               <a:rPr b="0" lang="ru-RU" sz="1200" spc="-1" strike="noStrike">
                 <a:latin typeface="Times New Roman"/>
               </a:rPr>
@@ -486,7 +480,7 @@
         <p:spPr>
           <a:xfrm>
             <a:off x="685800" y="1143000"/>
-            <a:ext cx="5485680" cy="3085560"/>
+            <a:ext cx="5485320" cy="3085200"/>
           </a:xfrm>
           <a:prstGeom prst="rect">
             <a:avLst/>
@@ -509,7 +503,7 @@
         <p:spPr>
           <a:xfrm>
             <a:off x="685800" y="4400640"/>
-            <a:ext cx="5485680" cy="3599640"/>
+            <a:ext cx="5485320" cy="3599280"/>
           </a:xfrm>
           <a:prstGeom prst="rect">
             <a:avLst/>
@@ -543,7 +537,7 @@
         <p:spPr>
           <a:xfrm>
             <a:off x="3884760" y="8685360"/>
-            <a:ext cx="2971080" cy="457920"/>
+            <a:ext cx="2970720" cy="457560"/>
           </a:xfrm>
           <a:prstGeom prst="rect">
             <a:avLst/>
@@ -575,7 +569,7 @@
               </a:lnSpc>
               <a:buNone/>
             </a:pPr>
-            <a:fld id="{CE4BF6B6-8382-4CF8-87BC-B3FD29B47A9E}" type="slidenum">
+            <a:fld id="{6EFDD5FB-D86D-4FAB-9344-8329F370F79C}" type="slidenum">
               <a:rPr b="0" lang="ru-RU" sz="1200" spc="-1" strike="noStrike">
                 <a:latin typeface="Times New Roman"/>
               </a:rPr>
@@ -643,7 +637,7 @@
         <p:txBody>
           <a:bodyPr/>
           <a:p>
-            <a:fld id="{1D335168-931D-4890-B392-8C55BD23F936}" type="slidenum">
+            <a:fld id="{79CD9A98-D302-418E-92E2-89DF8AF3DC63}" type="slidenum">
               <a:t>&lt;#&gt;</a:t>
             </a:fld>
           </a:p>
@@ -705,7 +699,7 @@
         <p:spPr>
           <a:xfrm>
             <a:off x="1143000" y="841680"/>
-            <a:ext cx="6857280" cy="1789920"/>
+            <a:ext cx="6856920" cy="1789560"/>
           </a:xfrm>
           <a:prstGeom prst="rect">
             <a:avLst/>
@@ -742,7 +736,7 @@
         <p:spPr>
           <a:xfrm>
             <a:off x="457200" y="1203480"/>
-            <a:ext cx="8229240" cy="1422720"/>
+            <a:ext cx="8228880" cy="1422360"/>
           </a:xfrm>
           <a:prstGeom prst="rect">
             <a:avLst/>
@@ -775,8 +769,8 @@
         </p:nvSpPr>
         <p:spPr>
           <a:xfrm>
-            <a:off x="457200" y="2761920"/>
-            <a:ext cx="8229240" cy="1422720"/>
+            <a:off x="457200" y="2761200"/>
+            <a:ext cx="8228880" cy="1422360"/>
           </a:xfrm>
           <a:prstGeom prst="rect">
             <a:avLst/>
@@ -831,7 +825,7 @@
         <p:txBody>
           <a:bodyPr/>
           <a:p>
-            <a:fld id="{FB964918-2EEF-4640-8162-FAFD7C42C8CB}" type="slidenum">
+            <a:fld id="{3D49C9A3-303A-4397-8E53-083182F3D554}" type="slidenum">
               <a:t>&lt;#&gt;</a:t>
             </a:fld>
           </a:p>
@@ -893,7 +887,7 @@
         <p:spPr>
           <a:xfrm>
             <a:off x="1143000" y="841680"/>
-            <a:ext cx="6857280" cy="1789920"/>
+            <a:ext cx="6856920" cy="1789560"/>
           </a:xfrm>
           <a:prstGeom prst="rect">
             <a:avLst/>
@@ -930,7 +924,7 @@
         <p:spPr>
           <a:xfrm>
             <a:off x="457200" y="1203480"/>
-            <a:ext cx="4015800" cy="1422720"/>
+            <a:ext cx="4015440" cy="1422360"/>
           </a:xfrm>
           <a:prstGeom prst="rect">
             <a:avLst/>
@@ -963,8 +957,8 @@
         </p:nvSpPr>
         <p:spPr>
           <a:xfrm>
-            <a:off x="4674240" y="1203480"/>
-            <a:ext cx="4015800" cy="1422720"/>
+            <a:off x="4673880" y="1203480"/>
+            <a:ext cx="4015440" cy="1422360"/>
           </a:xfrm>
           <a:prstGeom prst="rect">
             <a:avLst/>
@@ -997,8 +991,8 @@
         </p:nvSpPr>
         <p:spPr>
           <a:xfrm>
-            <a:off x="457200" y="2761920"/>
-            <a:ext cx="4015800" cy="1422720"/>
+            <a:off x="457200" y="2761200"/>
+            <a:ext cx="4015440" cy="1422360"/>
           </a:xfrm>
           <a:prstGeom prst="rect">
             <a:avLst/>
@@ -1031,8 +1025,8 @@
         </p:nvSpPr>
         <p:spPr>
           <a:xfrm>
-            <a:off x="4674240" y="2761920"/>
-            <a:ext cx="4015800" cy="1422720"/>
+            <a:off x="4673880" y="2761200"/>
+            <a:ext cx="4015440" cy="1422360"/>
           </a:xfrm>
           <a:prstGeom prst="rect">
             <a:avLst/>
@@ -1087,7 +1081,7 @@
         <p:txBody>
           <a:bodyPr/>
           <a:p>
-            <a:fld id="{9831F9ED-7719-4601-8943-EAC0D3F8BD72}" type="slidenum">
+            <a:fld id="{93CCE5EC-1FDC-47FF-8C56-6506A5BE5146}" type="slidenum">
               <a:t>&lt;#&gt;</a:t>
             </a:fld>
           </a:p>
@@ -1149,7 +1143,7 @@
         <p:spPr>
           <a:xfrm>
             <a:off x="1143000" y="841680"/>
-            <a:ext cx="6857280" cy="1789920"/>
+            <a:ext cx="6856920" cy="1789560"/>
           </a:xfrm>
           <a:prstGeom prst="rect">
             <a:avLst/>
@@ -1186,7 +1180,7 @@
         <p:spPr>
           <a:xfrm>
             <a:off x="457200" y="1203480"/>
-            <a:ext cx="2649600" cy="1422720"/>
+            <a:ext cx="2649600" cy="1422360"/>
           </a:xfrm>
           <a:prstGeom prst="rect">
             <a:avLst/>
@@ -1220,7 +1214,7 @@
         <p:spPr>
           <a:xfrm>
             <a:off x="3239640" y="1203480"/>
-            <a:ext cx="2649600" cy="1422720"/>
+            <a:ext cx="2649600" cy="1422360"/>
           </a:xfrm>
           <a:prstGeom prst="rect">
             <a:avLst/>
@@ -1254,7 +1248,7 @@
         <p:spPr>
           <a:xfrm>
             <a:off x="6022080" y="1203480"/>
-            <a:ext cx="2649600" cy="1422720"/>
+            <a:ext cx="2649600" cy="1422360"/>
           </a:xfrm>
           <a:prstGeom prst="rect">
             <a:avLst/>
@@ -1287,8 +1281,8 @@
         </p:nvSpPr>
         <p:spPr>
           <a:xfrm>
-            <a:off x="457200" y="2761920"/>
-            <a:ext cx="2649600" cy="1422720"/>
+            <a:off x="457200" y="2761200"/>
+            <a:ext cx="2649600" cy="1422360"/>
           </a:xfrm>
           <a:prstGeom prst="rect">
             <a:avLst/>
@@ -1321,8 +1315,8 @@
         </p:nvSpPr>
         <p:spPr>
           <a:xfrm>
-            <a:off x="3239640" y="2761920"/>
-            <a:ext cx="2649600" cy="1422720"/>
+            <a:off x="3239640" y="2761200"/>
+            <a:ext cx="2649600" cy="1422360"/>
           </a:xfrm>
           <a:prstGeom prst="rect">
             <a:avLst/>
@@ -1355,8 +1349,8 @@
         </p:nvSpPr>
         <p:spPr>
           <a:xfrm>
-            <a:off x="6022080" y="2761920"/>
-            <a:ext cx="2649600" cy="1422720"/>
+            <a:off x="6022080" y="2761200"/>
+            <a:ext cx="2649600" cy="1422360"/>
           </a:xfrm>
           <a:prstGeom prst="rect">
             <a:avLst/>
@@ -1411,7 +1405,7 @@
         <p:txBody>
           <a:bodyPr/>
           <a:p>
-            <a:fld id="{8FD59971-5046-4A16-92FF-FC0B2C054B07}" type="slidenum">
+            <a:fld id="{18970E32-7AC2-441B-BD34-7210FEFFBBCA}" type="slidenum">
               <a:t>&lt;#&gt;</a:t>
             </a:fld>
           </a:p>
@@ -1473,7 +1467,7 @@
         <p:spPr>
           <a:xfrm>
             <a:off x="1143000" y="841680"/>
-            <a:ext cx="6857280" cy="1789920"/>
+            <a:ext cx="6856920" cy="1789560"/>
           </a:xfrm>
           <a:prstGeom prst="rect">
             <a:avLst/>
@@ -1510,7 +1504,7 @@
         <p:spPr>
           <a:xfrm>
             <a:off x="457200" y="1203480"/>
-            <a:ext cx="8229240" cy="2982960"/>
+            <a:ext cx="8228880" cy="2982600"/>
           </a:xfrm>
           <a:prstGeom prst="rect">
             <a:avLst/>
@@ -1568,7 +1562,7 @@
         <p:txBody>
           <a:bodyPr/>
           <a:p>
-            <a:fld id="{5595F764-9840-47D8-8984-E6E209C45E89}" type="slidenum">
+            <a:fld id="{03C65F96-D650-4EA5-9229-175E4975B43E}" type="slidenum">
               <a:t>&lt;#&gt;</a:t>
             </a:fld>
           </a:p>
@@ -1630,7 +1624,7 @@
         <p:spPr>
           <a:xfrm>
             <a:off x="1143000" y="841680"/>
-            <a:ext cx="6857280" cy="1789920"/>
+            <a:ext cx="6856920" cy="1789560"/>
           </a:xfrm>
           <a:prstGeom prst="rect">
             <a:avLst/>
@@ -1667,7 +1661,7 @@
         <p:spPr>
           <a:xfrm>
             <a:off x="457200" y="1203480"/>
-            <a:ext cx="8229240" cy="2982960"/>
+            <a:ext cx="8228880" cy="2982600"/>
           </a:xfrm>
           <a:prstGeom prst="rect">
             <a:avLst/>
@@ -1722,7 +1716,7 @@
         <p:txBody>
           <a:bodyPr/>
           <a:p>
-            <a:fld id="{B752752D-30C5-44F8-9013-D9112A5F1F64}" type="slidenum">
+            <a:fld id="{75FECBDA-28DD-49B3-AA6B-3A78996AE7EF}" type="slidenum">
               <a:t>&lt;#&gt;</a:t>
             </a:fld>
           </a:p>
@@ -1784,7 +1778,7 @@
         <p:spPr>
           <a:xfrm>
             <a:off x="1143000" y="841680"/>
-            <a:ext cx="6857280" cy="1789920"/>
+            <a:ext cx="6856920" cy="1789560"/>
           </a:xfrm>
           <a:prstGeom prst="rect">
             <a:avLst/>
@@ -1821,7 +1815,7 @@
         <p:spPr>
           <a:xfrm>
             <a:off x="457200" y="1203480"/>
-            <a:ext cx="4015800" cy="2982960"/>
+            <a:ext cx="4015440" cy="2982600"/>
           </a:xfrm>
           <a:prstGeom prst="rect">
             <a:avLst/>
@@ -1854,8 +1848,8 @@
         </p:nvSpPr>
         <p:spPr>
           <a:xfrm>
-            <a:off x="4674240" y="1203480"/>
-            <a:ext cx="4015800" cy="2982960"/>
+            <a:off x="4673880" y="1203480"/>
+            <a:ext cx="4015440" cy="2982600"/>
           </a:xfrm>
           <a:prstGeom prst="rect">
             <a:avLst/>
@@ -1910,7 +1904,7 @@
         <p:txBody>
           <a:bodyPr/>
           <a:p>
-            <a:fld id="{F182DA7C-89E8-4711-A4B6-5BE2ADF795EC}" type="slidenum">
+            <a:fld id="{2A11C0DD-AEEF-42C2-9E8A-9B4333C5D821}" type="slidenum">
               <a:t>&lt;#&gt;</a:t>
             </a:fld>
           </a:p>
@@ -1972,7 +1966,7 @@
         <p:spPr>
           <a:xfrm>
             <a:off x="1143000" y="841680"/>
-            <a:ext cx="6857280" cy="1789920"/>
+            <a:ext cx="6856920" cy="1789560"/>
           </a:xfrm>
           <a:prstGeom prst="rect">
             <a:avLst/>
@@ -2030,7 +2024,7 @@
         <p:txBody>
           <a:bodyPr/>
           <a:p>
-            <a:fld id="{E063CEFF-886F-4C35-A018-2AEE242170AC}" type="slidenum">
+            <a:fld id="{5730CC26-F3BF-4C6A-A343-21A59BE1541C}" type="slidenum">
               <a:t>&lt;#&gt;</a:t>
             </a:fld>
           </a:p>
@@ -2092,7 +2086,7 @@
         <p:spPr>
           <a:xfrm>
             <a:off x="1143000" y="841680"/>
-            <a:ext cx="6857280" cy="8298360"/>
+            <a:ext cx="6856920" cy="8296560"/>
           </a:xfrm>
           <a:prstGeom prst="rect">
             <a:avLst/>
@@ -2150,7 +2144,7 @@
         <p:txBody>
           <a:bodyPr/>
           <a:p>
-            <a:fld id="{D85F36C5-C174-47CC-A143-B6978F95E508}" type="slidenum">
+            <a:fld id="{5B1C9532-1C2A-432D-B041-24E5FA003F88}" type="slidenum">
               <a:t>&lt;#&gt;</a:t>
             </a:fld>
           </a:p>
@@ -2212,7 +2206,7 @@
         <p:spPr>
           <a:xfrm>
             <a:off x="1143000" y="841680"/>
-            <a:ext cx="6857280" cy="1789920"/>
+            <a:ext cx="6856920" cy="1789560"/>
           </a:xfrm>
           <a:prstGeom prst="rect">
             <a:avLst/>
@@ -2249,7 +2243,7 @@
         <p:spPr>
           <a:xfrm>
             <a:off x="457200" y="1203480"/>
-            <a:ext cx="4015800" cy="1422720"/>
+            <a:ext cx="4015440" cy="1422360"/>
           </a:xfrm>
           <a:prstGeom prst="rect">
             <a:avLst/>
@@ -2282,8 +2276,8 @@
         </p:nvSpPr>
         <p:spPr>
           <a:xfrm>
-            <a:off x="4674240" y="1203480"/>
-            <a:ext cx="4015800" cy="2982960"/>
+            <a:off x="4673880" y="1203480"/>
+            <a:ext cx="4015440" cy="2982600"/>
           </a:xfrm>
           <a:prstGeom prst="rect">
             <a:avLst/>
@@ -2316,8 +2310,8 @@
         </p:nvSpPr>
         <p:spPr>
           <a:xfrm>
-            <a:off x="457200" y="2761920"/>
-            <a:ext cx="4015800" cy="1422720"/>
+            <a:off x="457200" y="2761200"/>
+            <a:ext cx="4015440" cy="1422360"/>
           </a:xfrm>
           <a:prstGeom prst="rect">
             <a:avLst/>
@@ -2372,7 +2366,7 @@
         <p:txBody>
           <a:bodyPr/>
           <a:p>
-            <a:fld id="{42E0F44D-05A1-4F39-853D-64B7995F14F1}" type="slidenum">
+            <a:fld id="{E51BDA73-E935-4364-9108-E35A16E19673}" type="slidenum">
               <a:t>&lt;#&gt;</a:t>
             </a:fld>
           </a:p>
@@ -2434,7 +2428,7 @@
         <p:spPr>
           <a:xfrm>
             <a:off x="1143000" y="841680"/>
-            <a:ext cx="6857280" cy="1789920"/>
+            <a:ext cx="6856920" cy="1789560"/>
           </a:xfrm>
           <a:prstGeom prst="rect">
             <a:avLst/>
@@ -2471,7 +2465,7 @@
         <p:spPr>
           <a:xfrm>
             <a:off x="457200" y="1203480"/>
-            <a:ext cx="4015800" cy="2982960"/>
+            <a:ext cx="4015440" cy="2982600"/>
           </a:xfrm>
           <a:prstGeom prst="rect">
             <a:avLst/>
@@ -2504,8 +2498,8 @@
         </p:nvSpPr>
         <p:spPr>
           <a:xfrm>
-            <a:off x="4674240" y="1203480"/>
-            <a:ext cx="4015800" cy="1422720"/>
+            <a:off x="4673880" y="1203480"/>
+            <a:ext cx="4015440" cy="1422360"/>
           </a:xfrm>
           <a:prstGeom prst="rect">
             <a:avLst/>
@@ -2538,8 +2532,8 @@
         </p:nvSpPr>
         <p:spPr>
           <a:xfrm>
-            <a:off x="4674240" y="2761920"/>
-            <a:ext cx="4015800" cy="1422720"/>
+            <a:off x="4673880" y="2761200"/>
+            <a:ext cx="4015440" cy="1422360"/>
           </a:xfrm>
           <a:prstGeom prst="rect">
             <a:avLst/>
@@ -2594,7 +2588,7 @@
         <p:txBody>
           <a:bodyPr/>
           <a:p>
-            <a:fld id="{C3CBA9E3-FFAD-440E-AFA9-B73BED783146}" type="slidenum">
+            <a:fld id="{DAFCA437-4724-4338-844D-30F566EC501D}" type="slidenum">
               <a:t>&lt;#&gt;</a:t>
             </a:fld>
           </a:p>
@@ -2656,7 +2650,7 @@
         <p:spPr>
           <a:xfrm>
             <a:off x="1143000" y="841680"/>
-            <a:ext cx="6857280" cy="1789920"/>
+            <a:ext cx="6856920" cy="1789560"/>
           </a:xfrm>
           <a:prstGeom prst="rect">
             <a:avLst/>
@@ -2693,7 +2687,7 @@
         <p:spPr>
           <a:xfrm>
             <a:off x="457200" y="1203480"/>
-            <a:ext cx="4015800" cy="1422720"/>
+            <a:ext cx="4015440" cy="1422360"/>
           </a:xfrm>
           <a:prstGeom prst="rect">
             <a:avLst/>
@@ -2726,8 +2720,8 @@
         </p:nvSpPr>
         <p:spPr>
           <a:xfrm>
-            <a:off x="4674240" y="1203480"/>
-            <a:ext cx="4015800" cy="1422720"/>
+            <a:off x="4673880" y="1203480"/>
+            <a:ext cx="4015440" cy="1422360"/>
           </a:xfrm>
           <a:prstGeom prst="rect">
             <a:avLst/>
@@ -2760,8 +2754,8 @@
         </p:nvSpPr>
         <p:spPr>
           <a:xfrm>
-            <a:off x="457200" y="2761920"/>
-            <a:ext cx="8229240" cy="1422720"/>
+            <a:off x="457200" y="2761200"/>
+            <a:ext cx="8228880" cy="1422360"/>
           </a:xfrm>
           <a:prstGeom prst="rect">
             <a:avLst/>
@@ -2816,7 +2810,7 @@
         <p:txBody>
           <a:bodyPr/>
           <a:p>
-            <a:fld id="{04013901-B2F1-4263-9127-CD8C54601EAA}" type="slidenum">
+            <a:fld id="{B752FA5F-7CDA-4D3F-953A-EAEF72760D14}" type="slidenum">
               <a:t>&lt;#&gt;</a:t>
             </a:fld>
           </a:p>
@@ -2885,7 +2879,7 @@
         <p:spPr>
           <a:xfrm>
             <a:off x="1143000" y="841680"/>
-            <a:ext cx="6857280" cy="1789920"/>
+            <a:ext cx="6856920" cy="1789560"/>
           </a:xfrm>
           <a:prstGeom prst="rect">
             <a:avLst/>
@@ -2919,13 +2913,196 @@
             <a:spLocks noGrp="1"/>
           </p:cNvSpPr>
           <p:nvPr>
+            <p:ph type="body"/>
+          </p:nvPr>
+        </p:nvSpPr>
+        <p:spPr>
+          <a:xfrm>
+            <a:off x="457200" y="1203480"/>
+            <a:ext cx="8228880" cy="2982600"/>
+          </a:xfrm>
+          <a:prstGeom prst="rect">
+            <a:avLst/>
+          </a:prstGeom>
+          <a:noFill/>
+          <a:ln w="0">
+            <a:noFill/>
+          </a:ln>
+        </p:spPr>
+        <p:txBody>
+          <a:bodyPr lIns="0" rIns="0" tIns="0" bIns="0" anchor="t">
+            <a:normAutofit/>
+          </a:bodyPr>
+          <a:p>
+            <a:pPr marL="432000" indent="-324000">
+              <a:spcBef>
+                <a:spcPts val="1417"/>
+              </a:spcBef>
+              <a:buClr>
+                <a:srgbClr val="000000"/>
+              </a:buClr>
+              <a:buSzPct val="45000"/>
+              <a:buFont typeface="Wingdings" charset="2"/>
+              <a:buChar char=""/>
+            </a:pPr>
+            <a:r>
+              <a:rPr b="0" lang="en-US" sz="1800" spc="-1" strike="noStrike">
+                <a:latin typeface="Arial"/>
+              </a:rPr>
+              <a:t>Click to edit the outline text format</a:t>
+            </a:r>
+            <a:endParaRPr b="0" lang="en-US" sz="1800" spc="-1" strike="noStrike">
+              <a:latin typeface="Arial"/>
+            </a:endParaRPr>
+          </a:p>
+          <a:p>
+            <a:pPr lvl="1" marL="864000" indent="-324000">
+              <a:spcBef>
+                <a:spcPts val="1134"/>
+              </a:spcBef>
+              <a:buClr>
+                <a:srgbClr val="000000"/>
+              </a:buClr>
+              <a:buSzPct val="75000"/>
+              <a:buFont typeface="Symbol" charset="2"/>
+              <a:buChar char=""/>
+            </a:pPr>
+            <a:r>
+              <a:rPr b="0" lang="en-US" sz="1800" spc="-1" strike="noStrike">
+                <a:latin typeface="Arial"/>
+              </a:rPr>
+              <a:t>Second Outline Level</a:t>
+            </a:r>
+            <a:endParaRPr b="0" lang="en-US" sz="1800" spc="-1" strike="noStrike">
+              <a:latin typeface="Arial"/>
+            </a:endParaRPr>
+          </a:p>
+          <a:p>
+            <a:pPr lvl="2" marL="1296000" indent="-288000">
+              <a:spcBef>
+                <a:spcPts val="850"/>
+              </a:spcBef>
+              <a:buClr>
+                <a:srgbClr val="000000"/>
+              </a:buClr>
+              <a:buSzPct val="45000"/>
+              <a:buFont typeface="Wingdings" charset="2"/>
+              <a:buChar char=""/>
+            </a:pPr>
+            <a:r>
+              <a:rPr b="0" lang="en-US" sz="1800" spc="-1" strike="noStrike">
+                <a:latin typeface="Arial"/>
+              </a:rPr>
+              <a:t>Third Outline Level</a:t>
+            </a:r>
+            <a:endParaRPr b="0" lang="en-US" sz="1800" spc="-1" strike="noStrike">
+              <a:latin typeface="Arial"/>
+            </a:endParaRPr>
+          </a:p>
+          <a:p>
+            <a:pPr lvl="3" marL="1728000" indent="-216000">
+              <a:spcBef>
+                <a:spcPts val="567"/>
+              </a:spcBef>
+              <a:buClr>
+                <a:srgbClr val="000000"/>
+              </a:buClr>
+              <a:buSzPct val="75000"/>
+              <a:buFont typeface="Symbol" charset="2"/>
+              <a:buChar char=""/>
+            </a:pPr>
+            <a:r>
+              <a:rPr b="0" lang="en-US" sz="1800" spc="-1" strike="noStrike">
+                <a:latin typeface="Arial"/>
+              </a:rPr>
+              <a:t>Fourth Outline Level</a:t>
+            </a:r>
+            <a:endParaRPr b="0" lang="en-US" sz="1800" spc="-1" strike="noStrike">
+              <a:latin typeface="Arial"/>
+            </a:endParaRPr>
+          </a:p>
+          <a:p>
+            <a:pPr lvl="4" marL="2160000" indent="-216000">
+              <a:spcBef>
+                <a:spcPts val="283"/>
+              </a:spcBef>
+              <a:buClr>
+                <a:srgbClr val="000000"/>
+              </a:buClr>
+              <a:buSzPct val="45000"/>
+              <a:buFont typeface="Wingdings" charset="2"/>
+              <a:buChar char=""/>
+            </a:pPr>
+            <a:r>
+              <a:rPr b="0" lang="en-US" sz="1800" spc="-1" strike="noStrike">
+                <a:latin typeface="Arial"/>
+              </a:rPr>
+              <a:t>Fifth Outline Level</a:t>
+            </a:r>
+            <a:endParaRPr b="0" lang="en-US" sz="1800" spc="-1" strike="noStrike">
+              <a:latin typeface="Arial"/>
+            </a:endParaRPr>
+          </a:p>
+          <a:p>
+            <a:pPr lvl="5" marL="2592000" indent="-216000">
+              <a:spcBef>
+                <a:spcPts val="283"/>
+              </a:spcBef>
+              <a:buClr>
+                <a:srgbClr val="000000"/>
+              </a:buClr>
+              <a:buSzPct val="45000"/>
+              <a:buFont typeface="Wingdings" charset="2"/>
+              <a:buChar char=""/>
+            </a:pPr>
+            <a:r>
+              <a:rPr b="0" lang="en-US" sz="1800" spc="-1" strike="noStrike">
+                <a:latin typeface="Arial"/>
+              </a:rPr>
+              <a:t>Sixth Outline Level</a:t>
+            </a:r>
+            <a:endParaRPr b="0" lang="en-US" sz="1800" spc="-1" strike="noStrike">
+              <a:latin typeface="Arial"/>
+            </a:endParaRPr>
+          </a:p>
+          <a:p>
+            <a:pPr lvl="6" marL="3024000" indent="-216000">
+              <a:spcBef>
+                <a:spcPts val="283"/>
+              </a:spcBef>
+              <a:buClr>
+                <a:srgbClr val="000000"/>
+              </a:buClr>
+              <a:buSzPct val="45000"/>
+              <a:buFont typeface="Wingdings" charset="2"/>
+              <a:buChar char=""/>
+            </a:pPr>
+            <a:r>
+              <a:rPr b="0" lang="en-US" sz="1800" spc="-1" strike="noStrike">
+                <a:latin typeface="Arial"/>
+              </a:rPr>
+              <a:t>Seventh Outline Level</a:t>
+            </a:r>
+            <a:endParaRPr b="0" lang="en-US" sz="1800" spc="-1" strike="noStrike">
+              <a:latin typeface="Arial"/>
+            </a:endParaRPr>
+          </a:p>
+        </p:txBody>
+      </p:sp>
+      <p:sp>
+        <p:nvSpPr>
+          <p:cNvPr id="2" name="PlaceHolder 3"/>
+          <p:cNvSpPr>
+            <a:spLocks noGrp="1"/>
+          </p:cNvSpPr>
+          <p:nvPr>
             <p:ph type="ftr" idx="1"/>
           </p:nvPr>
         </p:nvSpPr>
         <p:spPr>
           <a:xfrm>
             <a:off x="3029040" y="4767120"/>
-            <a:ext cx="3085560" cy="273240"/>
+            <a:ext cx="3085200" cy="272880"/>
           </a:xfrm>
           <a:prstGeom prst="rect">
             <a:avLst/>
@@ -2971,7 +3148,7 @@
       </p:sp>
       <p:sp>
         <p:nvSpPr>
-          <p:cNvPr id="2" name="PlaceHolder 3"/>
+          <p:cNvPr id="3" name="PlaceHolder 4"/>
           <p:cNvSpPr>
             <a:spLocks noGrp="1"/>
           </p:cNvSpPr>
@@ -2982,7 +3159,7 @@
         <p:spPr>
           <a:xfrm>
             <a:off x="6458040" y="4767120"/>
-            <a:ext cx="2056680" cy="273240"/>
+            <a:ext cx="2056320" cy="272880"/>
           </a:xfrm>
           <a:prstGeom prst="rect">
             <a:avLst/>
@@ -3017,7 +3194,7 @@
               </a:lnSpc>
               <a:buNone/>
             </a:pPr>
-            <a:fld id="{0E153CB6-A109-4801-8DD2-30EE758F9ADF}" type="slidenum">
+            <a:fld id="{6123E16D-2FAE-49AD-9D7F-CEBFDC3DA3F7}" type="slidenum">
               <a:rPr b="0" lang="en-US" sz="900" spc="-1" strike="noStrike">
                 <a:solidFill>
                   <a:srgbClr val="8b8b8b"/>
@@ -3034,7 +3211,7 @@
       </p:sp>
       <p:sp>
         <p:nvSpPr>
-          <p:cNvPr id="3" name="PlaceHolder 4"/>
+          <p:cNvPr id="4" name="PlaceHolder 5"/>
           <p:cNvSpPr>
             <a:spLocks noGrp="1"/>
           </p:cNvSpPr>
@@ -3045,7 +3222,7 @@
         <p:spPr>
           <a:xfrm>
             <a:off x="628560" y="4767120"/>
-            <a:ext cx="2056680" cy="273240"/>
+            <a:ext cx="2056320" cy="272880"/>
           </a:xfrm>
           <a:prstGeom prst="rect">
             <a:avLst/>
@@ -3075,189 +3252,6 @@
             </a:r>
             <a:endParaRPr b="0" lang="en-US" sz="1400" spc="-1" strike="noStrike">
               <a:latin typeface="Times New Roman"/>
-            </a:endParaRPr>
-          </a:p>
-        </p:txBody>
-      </p:sp>
-      <p:sp>
-        <p:nvSpPr>
-          <p:cNvPr id="4" name="PlaceHolder 5"/>
-          <p:cNvSpPr>
-            <a:spLocks noGrp="1"/>
-          </p:cNvSpPr>
-          <p:nvPr>
-            <p:ph type="body"/>
-          </p:nvPr>
-        </p:nvSpPr>
-        <p:spPr>
-          <a:xfrm>
-            <a:off x="457200" y="1203480"/>
-            <a:ext cx="8229240" cy="2982960"/>
-          </a:xfrm>
-          <a:prstGeom prst="rect">
-            <a:avLst/>
-          </a:prstGeom>
-          <a:noFill/>
-          <a:ln w="0">
-            <a:noFill/>
-          </a:ln>
-        </p:spPr>
-        <p:txBody>
-          <a:bodyPr lIns="0" rIns="0" tIns="0" bIns="0" anchor="t">
-            <a:normAutofit/>
-          </a:bodyPr>
-          <a:p>
-            <a:pPr marL="432000" indent="-324000">
-              <a:spcBef>
-                <a:spcPts val="1417"/>
-              </a:spcBef>
-              <a:buClr>
-                <a:srgbClr val="000000"/>
-              </a:buClr>
-              <a:buSzPct val="45000"/>
-              <a:buFont typeface="Wingdings" charset="2"/>
-              <a:buChar char=""/>
-            </a:pPr>
-            <a:r>
-              <a:rPr b="0" lang="en-US" sz="3200" spc="-1" strike="noStrike">
-                <a:latin typeface="Arial"/>
-              </a:rPr>
-              <a:t>Click to edit the outline text format</a:t>
-            </a:r>
-            <a:endParaRPr b="0" lang="en-US" sz="3200" spc="-1" strike="noStrike">
-              <a:latin typeface="Arial"/>
-            </a:endParaRPr>
-          </a:p>
-          <a:p>
-            <a:pPr lvl="1" marL="864000" indent="-324000">
-              <a:spcBef>
-                <a:spcPts val="1134"/>
-              </a:spcBef>
-              <a:buClr>
-                <a:srgbClr val="000000"/>
-              </a:buClr>
-              <a:buSzPct val="75000"/>
-              <a:buFont typeface="Symbol" charset="2"/>
-              <a:buChar char=""/>
-            </a:pPr>
-            <a:r>
-              <a:rPr b="0" lang="en-US" sz="2800" spc="-1" strike="noStrike">
-                <a:latin typeface="Arial"/>
-              </a:rPr>
-              <a:t>Second Outline Level</a:t>
-            </a:r>
-            <a:endParaRPr b="0" lang="en-US" sz="2800" spc="-1" strike="noStrike">
-              <a:latin typeface="Arial"/>
-            </a:endParaRPr>
-          </a:p>
-          <a:p>
-            <a:pPr lvl="2" marL="1296000" indent="-288000">
-              <a:spcBef>
-                <a:spcPts val="850"/>
-              </a:spcBef>
-              <a:buClr>
-                <a:srgbClr val="000000"/>
-              </a:buClr>
-              <a:buSzPct val="45000"/>
-              <a:buFont typeface="Wingdings" charset="2"/>
-              <a:buChar char=""/>
-            </a:pPr>
-            <a:r>
-              <a:rPr b="0" lang="en-US" sz="2400" spc="-1" strike="noStrike">
-                <a:latin typeface="Arial"/>
-              </a:rPr>
-              <a:t>Third Outline Level</a:t>
-            </a:r>
-            <a:endParaRPr b="0" lang="en-US" sz="2400" spc="-1" strike="noStrike">
-              <a:latin typeface="Arial"/>
-            </a:endParaRPr>
-          </a:p>
-          <a:p>
-            <a:pPr lvl="3" marL="1728000" indent="-216000">
-              <a:spcBef>
-                <a:spcPts val="567"/>
-              </a:spcBef>
-              <a:buClr>
-                <a:srgbClr val="000000"/>
-              </a:buClr>
-              <a:buSzPct val="75000"/>
-              <a:buFont typeface="Symbol" charset="2"/>
-              <a:buChar char=""/>
-            </a:pPr>
-            <a:r>
-              <a:rPr b="0" lang="en-US" sz="2000" spc="-1" strike="noStrike">
-                <a:latin typeface="Arial"/>
-              </a:rPr>
-              <a:t>Fourth Outline Level</a:t>
-            </a:r>
-            <a:endParaRPr b="0" lang="en-US" sz="2000" spc="-1" strike="noStrike">
-              <a:latin typeface="Arial"/>
-            </a:endParaRPr>
-          </a:p>
-          <a:p>
-            <a:pPr lvl="4" marL="2160000" indent="-216000">
-              <a:spcBef>
-                <a:spcPts val="283"/>
-              </a:spcBef>
-              <a:buClr>
-                <a:srgbClr val="000000"/>
-              </a:buClr>
-              <a:buSzPct val="45000"/>
-              <a:buFont typeface="Wingdings" charset="2"/>
-              <a:buChar char=""/>
-            </a:pPr>
-            <a:r>
-              <a:rPr b="0" lang="en-US" sz="2000" spc="-1" strike="noStrike">
-                <a:latin typeface="Arial"/>
-              </a:rPr>
-              <a:t>Fifth Outline Level</a:t>
-            </a:r>
-            <a:endParaRPr b="0" lang="en-US" sz="2000" spc="-1" strike="noStrike">
-              <a:latin typeface="Arial"/>
-            </a:endParaRPr>
-          </a:p>
-          <a:p>
-            <a:pPr lvl="5" marL="2592000" indent="-216000">
-              <a:spcBef>
-                <a:spcPts val="283"/>
-              </a:spcBef>
-              <a:buClr>
-                <a:srgbClr val="000000"/>
-              </a:buClr>
-              <a:buSzPct val="45000"/>
-              <a:buFont typeface="Wingdings" charset="2"/>
-              <a:buChar char=""/>
-            </a:pPr>
-            <a:r>
-              <a:rPr b="0" lang="en-US" sz="2000" spc="-1" strike="noStrike">
-                <a:latin typeface="Arial"/>
-              </a:rPr>
-              <a:t>Sixth Outline Level</a:t>
-            </a:r>
-            <a:endParaRPr b="0" lang="en-US" sz="2000" spc="-1" strike="noStrike">
-              <a:latin typeface="Arial"/>
-            </a:endParaRPr>
-          </a:p>
-          <a:p>
-            <a:pPr lvl="6" marL="3024000" indent="-216000">
-              <a:spcBef>
-                <a:spcPts val="283"/>
-              </a:spcBef>
-              <a:buClr>
-                <a:srgbClr val="000000"/>
-              </a:buClr>
-              <a:buSzPct val="45000"/>
-              <a:buFont typeface="Wingdings" charset="2"/>
-              <a:buChar char=""/>
-            </a:pPr>
-            <a:r>
-              <a:rPr b="0" lang="en-US" sz="2000" spc="-1" strike="noStrike">
-                <a:latin typeface="Arial"/>
-              </a:rPr>
-              <a:t>Seventh Outline Level</a:t>
-            </a:r>
-            <a:endParaRPr b="0" lang="en-US" sz="2000" spc="-1" strike="noStrike">
-              <a:latin typeface="Arial"/>
             </a:endParaRPr>
           </a:p>
         </p:txBody>
@@ -3308,7 +3302,7 @@
         <p:spPr>
           <a:xfrm>
             <a:off x="186840" y="178200"/>
-            <a:ext cx="8769960" cy="4757760"/>
+            <a:ext cx="8769600" cy="4757400"/>
           </a:xfrm>
           <a:prstGeom prst="roundRect">
             <a:avLst>
@@ -3346,7 +3340,7 @@
         <p:spPr>
           <a:xfrm>
             <a:off x="460080" y="4445640"/>
-            <a:ext cx="2998800" cy="269280"/>
+            <a:ext cx="2998440" cy="268920"/>
           </a:xfrm>
           <a:prstGeom prst="rect">
             <a:avLst/>
@@ -3412,7 +3406,7 @@
         <p:spPr>
           <a:xfrm>
             <a:off x="2423160" y="4446360"/>
-            <a:ext cx="290880" cy="290880"/>
+            <a:ext cx="290520" cy="290520"/>
           </a:xfrm>
           <a:prstGeom prst="rect">
             <a:avLst/>
@@ -3431,7 +3425,7 @@
         <p:spPr>
           <a:xfrm>
             <a:off x="460080" y="622080"/>
-            <a:ext cx="6925680" cy="3306600"/>
+            <a:ext cx="6925320" cy="3306240"/>
           </a:xfrm>
           <a:prstGeom prst="rect">
             <a:avLst/>
@@ -3487,7 +3481,7 @@
         <p:spPr>
           <a:xfrm>
             <a:off x="5753880" y="2557440"/>
-            <a:ext cx="4009680" cy="3133080"/>
+            <a:ext cx="4009320" cy="3132720"/>
           </a:xfrm>
           <a:prstGeom prst="rect">
             <a:avLst/>
@@ -3540,7 +3534,7 @@
         <p:spPr>
           <a:xfrm>
             <a:off x="5753880" y="2557440"/>
-            <a:ext cx="4009680" cy="3133080"/>
+            <a:ext cx="4009320" cy="3132720"/>
           </a:xfrm>
           <a:prstGeom prst="rect">
             <a:avLst/>
@@ -3559,7 +3553,7 @@
         <p:spPr>
           <a:xfrm>
             <a:off x="185760" y="831240"/>
-            <a:ext cx="899280" cy="899280"/>
+            <a:ext cx="898920" cy="898920"/>
           </a:xfrm>
           <a:prstGeom prst="ellipse">
             <a:avLst/>
@@ -3619,7 +3613,7 @@
         <p:spPr>
           <a:xfrm>
             <a:off x="185760" y="2381400"/>
-            <a:ext cx="899280" cy="887400"/>
+            <a:ext cx="898920" cy="887040"/>
           </a:xfrm>
           <a:prstGeom prst="ellipse">
             <a:avLst/>
@@ -3679,7 +3673,7 @@
         <p:spPr>
           <a:xfrm>
             <a:off x="185760" y="3860640"/>
-            <a:ext cx="899280" cy="899280"/>
+            <a:ext cx="898920" cy="898920"/>
           </a:xfrm>
           <a:prstGeom prst="ellipse">
             <a:avLst/>
@@ -3739,7 +3733,7 @@
         <p:spPr>
           <a:xfrm>
             <a:off x="967680" y="797040"/>
-            <a:ext cx="3764520" cy="550440"/>
+            <a:ext cx="3764160" cy="550080"/>
           </a:xfrm>
           <a:prstGeom prst="rect">
             <a:avLst/>
@@ -3801,7 +3795,7 @@
         <p:spPr>
           <a:xfrm>
             <a:off x="967680" y="1332720"/>
-            <a:ext cx="3764520" cy="789480"/>
+            <a:ext cx="3764160" cy="789120"/>
           </a:xfrm>
           <a:prstGeom prst="rect">
             <a:avLst/>
@@ -3863,7 +3857,7 @@
         <p:spPr>
           <a:xfrm>
             <a:off x="964080" y="2292480"/>
-            <a:ext cx="3764520" cy="550440"/>
+            <a:ext cx="3764160" cy="550080"/>
           </a:xfrm>
           <a:prstGeom prst="rect">
             <a:avLst/>
@@ -3915,7 +3909,7 @@
         <p:spPr>
           <a:xfrm>
             <a:off x="964080" y="2825280"/>
-            <a:ext cx="3764520" cy="843120"/>
+            <a:ext cx="3764160" cy="842760"/>
           </a:xfrm>
           <a:prstGeom prst="rect">
             <a:avLst/>
@@ -3977,7 +3971,7 @@
         <p:spPr>
           <a:xfrm>
             <a:off x="964080" y="3777840"/>
-            <a:ext cx="3764520" cy="550440"/>
+            <a:ext cx="3764160" cy="550080"/>
           </a:xfrm>
           <a:prstGeom prst="rect">
             <a:avLst/>
@@ -4029,7 +4023,7 @@
         <p:spPr>
           <a:xfrm>
             <a:off x="964080" y="4310640"/>
-            <a:ext cx="3764520" cy="794520"/>
+            <a:ext cx="3764160" cy="794160"/>
           </a:xfrm>
           <a:prstGeom prst="rect">
             <a:avLst/>
@@ -4091,7 +4085,7 @@
         <p:spPr>
           <a:xfrm>
             <a:off x="5084640" y="987840"/>
-            <a:ext cx="3687480" cy="3496680"/>
+            <a:ext cx="3687120" cy="3496320"/>
           </a:xfrm>
           <a:prstGeom prst="roundRect">
             <a:avLst>
@@ -4155,7 +4149,7 @@
         <p:spPr>
           <a:xfrm>
             <a:off x="8519760" y="4831560"/>
-            <a:ext cx="484560" cy="226800"/>
+            <a:ext cx="484200" cy="226800"/>
           </a:xfrm>
           <a:prstGeom prst="rect">
             <a:avLst/>
@@ -4207,7 +4201,7 @@
         <p:spPr>
           <a:xfrm>
             <a:off x="421200" y="228600"/>
-            <a:ext cx="8457840" cy="685440"/>
+            <a:ext cx="8457480" cy="685080"/>
           </a:xfrm>
           <a:prstGeom prst="rect">
             <a:avLst/>
@@ -4236,7 +4230,11 @@
             </a:pPr>
             <a:r>
               <a:rPr b="0" lang="en-US" sz="1800" spc="-1" strike="noStrike">
+                <a:solidFill>
+                  <a:srgbClr val="000000"/>
+                </a:solidFill>
                 <a:latin typeface="Arial"/>
+                <a:ea typeface="DejaVu Sans"/>
               </a:rPr>
               <a:t>TITLE</a:t>
             </a:r>
@@ -4285,7 +4283,7 @@
         <p:spPr>
           <a:xfrm>
             <a:off x="506520" y="1484640"/>
-            <a:ext cx="2556720" cy="2055240"/>
+            <a:ext cx="2556360" cy="2054880"/>
           </a:xfrm>
           <a:prstGeom prst="roundRect">
             <a:avLst>
@@ -4325,7 +4323,7 @@
         <p:spPr>
           <a:xfrm>
             <a:off x="624240" y="1616760"/>
-            <a:ext cx="2289600" cy="729000"/>
+            <a:ext cx="2289240" cy="728640"/>
           </a:xfrm>
           <a:prstGeom prst="rect">
             <a:avLst/>
@@ -4377,7 +4375,7 @@
         <p:spPr>
           <a:xfrm>
             <a:off x="624240" y="2400480"/>
-            <a:ext cx="2289600" cy="1162080"/>
+            <a:ext cx="2289240" cy="1161720"/>
           </a:xfrm>
           <a:prstGeom prst="rect">
             <a:avLst/>
@@ -4439,7 +4437,7 @@
         <p:spPr>
           <a:xfrm>
             <a:off x="3309120" y="2066040"/>
-            <a:ext cx="2556720" cy="2055240"/>
+            <a:ext cx="2556360" cy="2054880"/>
           </a:xfrm>
           <a:prstGeom prst="roundRect">
             <a:avLst>
@@ -4479,7 +4477,7 @@
         <p:spPr>
           <a:xfrm>
             <a:off x="3426840" y="2198160"/>
-            <a:ext cx="2289600" cy="729000"/>
+            <a:ext cx="2289240" cy="728640"/>
           </a:xfrm>
           <a:prstGeom prst="rect">
             <a:avLst/>
@@ -4531,7 +4529,7 @@
         <p:spPr>
           <a:xfrm>
             <a:off x="3426840" y="2981880"/>
-            <a:ext cx="2289600" cy="1162080"/>
+            <a:ext cx="2289240" cy="1161720"/>
           </a:xfrm>
           <a:prstGeom prst="rect">
             <a:avLst/>
@@ -4583,7 +4581,7 @@
         <p:spPr>
           <a:xfrm>
             <a:off x="6111720" y="2659320"/>
-            <a:ext cx="2556720" cy="2055240"/>
+            <a:ext cx="2556360" cy="2054880"/>
           </a:xfrm>
           <a:prstGeom prst="roundRect">
             <a:avLst>
@@ -4623,7 +4621,7 @@
         <p:spPr>
           <a:xfrm>
             <a:off x="6229440" y="2791440"/>
-            <a:ext cx="2289600" cy="729000"/>
+            <a:ext cx="2289240" cy="728640"/>
           </a:xfrm>
           <a:prstGeom prst="rect">
             <a:avLst/>
@@ -4658,7 +4656,7 @@
                 <a:latin typeface="Arial"/>
                 <a:ea typeface="DejaVu Sans"/>
               </a:rPr>
-              <a:t>SUBTITLE2</a:t>
+              <a:t>SUBTITLE3</a:t>
             </a:r>
             <a:endParaRPr b="0" lang="en-US" sz="1400" spc="-1" strike="noStrike">
               <a:latin typeface="Arial"/>
@@ -4675,7 +4673,7 @@
         <p:spPr>
           <a:xfrm>
             <a:off x="6229440" y="3574800"/>
-            <a:ext cx="2289600" cy="1162080"/>
+            <a:ext cx="2289240" cy="1161720"/>
           </a:xfrm>
           <a:prstGeom prst="rect">
             <a:avLst/>
@@ -4710,7 +4708,7 @@
                 <a:latin typeface="Arial"/>
                 <a:ea typeface="DejaVu Sans"/>
               </a:rPr>
-              <a:t>TEXT2</a:t>
+              <a:t>TEXT3</a:t>
             </a:r>
             <a:endParaRPr b="0" lang="en-US" sz="1100" spc="-1" strike="noStrike">
               <a:latin typeface="Arial"/>
@@ -4727,7 +4725,7 @@
         <p:spPr>
           <a:xfrm>
             <a:off x="8519760" y="4831560"/>
-            <a:ext cx="484560" cy="226800"/>
+            <a:ext cx="484200" cy="226800"/>
           </a:xfrm>
           <a:prstGeom prst="rect">
             <a:avLst/>
@@ -4779,7 +4777,7 @@
         <p:spPr>
           <a:xfrm>
             <a:off x="457200" y="228600"/>
-            <a:ext cx="8229240" cy="1142640"/>
+            <a:ext cx="8228880" cy="1142280"/>
           </a:xfrm>
           <a:prstGeom prst="rect">
             <a:avLst/>
@@ -4808,7 +4806,11 @@
             </a:pPr>
             <a:r>
               <a:rPr b="0" lang="en-US" sz="1800" spc="-1" strike="noStrike">
+                <a:solidFill>
+                  <a:srgbClr val="000000"/>
+                </a:solidFill>
                 <a:latin typeface="Arial"/>
+                <a:ea typeface="DejaVu Sans"/>
               </a:rPr>
               <a:t>TITLE</a:t>
             </a:r>
@@ -4857,7 +4859,7 @@
         <p:spPr>
           <a:xfrm>
             <a:off x="3601800" y="3271680"/>
-            <a:ext cx="5236200" cy="1320840"/>
+            <a:ext cx="5235840" cy="1320480"/>
           </a:xfrm>
           <a:prstGeom prst="roundRect">
             <a:avLst>
@@ -4895,7 +4897,7 @@
         <p:spPr>
           <a:xfrm>
             <a:off x="6308640" y="1028880"/>
-            <a:ext cx="2532960" cy="2056680"/>
+            <a:ext cx="2532600" cy="2056320"/>
           </a:xfrm>
           <a:prstGeom prst="roundRect">
             <a:avLst>
@@ -4933,7 +4935,7 @@
         <p:spPr>
           <a:xfrm>
             <a:off x="3604320" y="1014480"/>
-            <a:ext cx="2532960" cy="2056680"/>
+            <a:ext cx="2532600" cy="2056320"/>
           </a:xfrm>
           <a:prstGeom prst="roundRect">
             <a:avLst>
@@ -4971,7 +4973,7 @@
         <p:spPr>
           <a:xfrm>
             <a:off x="3696480" y="1059120"/>
-            <a:ext cx="2343240" cy="713520"/>
+            <a:ext cx="2342880" cy="713160"/>
           </a:xfrm>
           <a:prstGeom prst="rect">
             <a:avLst/>
@@ -5033,7 +5035,7 @@
         <p:spPr>
           <a:xfrm>
             <a:off x="3696480" y="1843560"/>
-            <a:ext cx="2343240" cy="1141920"/>
+            <a:ext cx="2342880" cy="1141560"/>
           </a:xfrm>
           <a:prstGeom prst="rect">
             <a:avLst/>
@@ -5095,7 +5097,7 @@
         <p:spPr>
           <a:xfrm>
             <a:off x="6400080" y="1059120"/>
-            <a:ext cx="2340000" cy="713520"/>
+            <a:ext cx="2339640" cy="713160"/>
           </a:xfrm>
           <a:prstGeom prst="rect">
             <a:avLst/>
@@ -5147,7 +5149,7 @@
         <p:spPr>
           <a:xfrm>
             <a:off x="6400080" y="1843560"/>
-            <a:ext cx="2340000" cy="1141920"/>
+            <a:ext cx="2339640" cy="1141560"/>
           </a:xfrm>
           <a:prstGeom prst="rect">
             <a:avLst/>
@@ -5209,7 +5211,7 @@
         <p:spPr>
           <a:xfrm>
             <a:off x="3696480" y="3362040"/>
-            <a:ext cx="5236200" cy="328680"/>
+            <a:ext cx="5235840" cy="328320"/>
           </a:xfrm>
           <a:prstGeom prst="rect">
             <a:avLst/>
@@ -5261,7 +5263,7 @@
         <p:spPr>
           <a:xfrm>
             <a:off x="3696480" y="3713400"/>
-            <a:ext cx="5146560" cy="713520"/>
+            <a:ext cx="5146200" cy="713160"/>
           </a:xfrm>
           <a:prstGeom prst="rect">
             <a:avLst/>
@@ -5323,7 +5325,7 @@
         <p:spPr>
           <a:xfrm>
             <a:off x="384840" y="1028880"/>
-            <a:ext cx="3002400" cy="3564000"/>
+            <a:ext cx="3002040" cy="3563640"/>
           </a:xfrm>
           <a:prstGeom prst="roundRect">
             <a:avLst>
@@ -5387,7 +5389,7 @@
         <p:spPr>
           <a:xfrm>
             <a:off x="8519760" y="4831560"/>
-            <a:ext cx="484560" cy="226800"/>
+            <a:ext cx="484200" cy="226800"/>
           </a:xfrm>
           <a:prstGeom prst="rect">
             <a:avLst/>
@@ -5439,7 +5441,7 @@
         <p:spPr>
           <a:xfrm>
             <a:off x="313200" y="228600"/>
-            <a:ext cx="8457840" cy="685440"/>
+            <a:ext cx="8457480" cy="685080"/>
           </a:xfrm>
           <a:prstGeom prst="rect">
             <a:avLst/>
@@ -5468,7 +5470,11 @@
             </a:pPr>
             <a:r>
               <a:rPr b="0" lang="en-US" sz="1800" spc="-1" strike="noStrike">
+                <a:solidFill>
+                  <a:srgbClr val="000000"/>
+                </a:solidFill>
                 <a:latin typeface="Arial"/>
+                <a:ea typeface="DejaVu Sans"/>
               </a:rPr>
               <a:t>TITLE</a:t>
             </a:r>
@@ -5517,7 +5523,7 @@
         <p:spPr>
           <a:xfrm>
             <a:off x="186840" y="178200"/>
-            <a:ext cx="8769960" cy="4757760"/>
+            <a:ext cx="8769600" cy="4757400"/>
           </a:xfrm>
           <a:prstGeom prst="roundRect">
             <a:avLst>
@@ -5555,7 +5561,7 @@
         <p:spPr>
           <a:xfrm>
             <a:off x="1640880" y="4489920"/>
-            <a:ext cx="2998800" cy="269280"/>
+            <a:ext cx="2998440" cy="268920"/>
           </a:xfrm>
           <a:prstGeom prst="rect">
             <a:avLst/>
@@ -5617,7 +5623,7 @@
         <p:spPr>
           <a:xfrm>
             <a:off x="867240" y="3488040"/>
-            <a:ext cx="256680" cy="256680"/>
+            <a:ext cx="256320" cy="256320"/>
           </a:xfrm>
           <a:prstGeom prst="ellipse">
             <a:avLst/>
@@ -5652,7 +5658,7 @@
         <p:spPr>
           <a:xfrm>
             <a:off x="351000" y="3691440"/>
-            <a:ext cx="1289160" cy="1133280"/>
+            <a:ext cx="1288800" cy="1132920"/>
           </a:xfrm>
           <a:prstGeom prst="rect">
             <a:avLst/>
@@ -5671,7 +5677,7 @@
         <p:spPr>
           <a:xfrm>
             <a:off x="460080" y="622080"/>
-            <a:ext cx="6925680" cy="3306600"/>
+            <a:ext cx="6925320" cy="3306240"/>
           </a:xfrm>
           <a:prstGeom prst="rect">
             <a:avLst/>
@@ -5727,7 +5733,7 @@
         <p:spPr>
           <a:xfrm>
             <a:off x="5753880" y="2557440"/>
-            <a:ext cx="4009680" cy="3133080"/>
+            <a:ext cx="4009320" cy="3132720"/>
           </a:xfrm>
           <a:prstGeom prst="rect">
             <a:avLst/>
